--- a/chapter6/parts/part-08-advanced-eda-techniques/clip.pptx
+++ b/chapter6/parts/part-08-advanced-eda-techniques/clip.pptx
@@ -4171,7 +4171,7 @@
               </a:defRPr>
             </a:pPr>
             <a:r>
-              <a:t>Chapter 6 — 08 Advanced Eda Techniques</a:t>
+              <a:t>Chapter 6 — Advanced Eda Techniques</a:t>
             </a:r>
           </a:p>
         </p:txBody>
@@ -4330,7 +4330,7 @@
               </a:defRPr>
             </a:pPr>
             <a:r>
-              <a:t>Chapter 6 — 08 Advanced Eda Techniques</a:t>
+              <a:t>Chapter 6 — Advanced Eda Techniques</a:t>
             </a:r>
           </a:p>
         </p:txBody>
@@ -4509,7 +4509,7 @@
               </a:defRPr>
             </a:pPr>
             <a:r>
-              <a:t>Chapter 6 — 08 Advanced Eda Techniques</a:t>
+              <a:t>Chapter 6 — Advanced Eda Techniques</a:t>
             </a:r>
           </a:p>
         </p:txBody>
@@ -4688,7 +4688,7 @@
               </a:defRPr>
             </a:pPr>
             <a:r>
-              <a:t>Chapter 6 — 08 Advanced Eda Techniques</a:t>
+              <a:t>Chapter 6 — Advanced Eda Techniques</a:t>
             </a:r>
           </a:p>
         </p:txBody>
@@ -4887,7 +4887,7 @@
               </a:defRPr>
             </a:pPr>
             <a:r>
-              <a:t>Chapter 6 — 08 Advanced Eda Techniques</a:t>
+              <a:t>Chapter 6 — Advanced Eda Techniques</a:t>
             </a:r>
           </a:p>
         </p:txBody>
@@ -5046,7 +5046,7 @@
               </a:defRPr>
             </a:pPr>
             <a:r>
-              <a:t>Chapter 6 — 08 Advanced Eda Techniques</a:t>
+              <a:t>Chapter 6 — Advanced Eda Techniques</a:t>
             </a:r>
           </a:p>
         </p:txBody>
@@ -5205,7 +5205,7 @@
               </a:defRPr>
             </a:pPr>
             <a:r>
-              <a:t>Chapter 6 — 08 Advanced Eda Techniques</a:t>
+              <a:t>Chapter 6 — Advanced Eda Techniques</a:t>
             </a:r>
           </a:p>
         </p:txBody>
@@ -5384,7 +5384,7 @@
               </a:defRPr>
             </a:pPr>
             <a:r>
-              <a:t>Chapter 6 — 08 Advanced Eda Techniques</a:t>
+              <a:t>Chapter 6 — Advanced Eda Techniques</a:t>
             </a:r>
           </a:p>
         </p:txBody>
@@ -5543,7 +5543,7 @@
               </a:defRPr>
             </a:pPr>
             <a:r>
-              <a:t>Chapter 6 — 08 Advanced Eda Techniques</a:t>
+              <a:t>Chapter 6 — Advanced Eda Techniques</a:t>
             </a:r>
           </a:p>
         </p:txBody>

--- a/chapter6/parts/part-08-advanced-eda-techniques/clip.pptx
+++ b/chapter6/parts/part-08-advanced-eda-techniques/clip.pptx
@@ -4255,10 +4255,12 @@
           </a:bodyPr>
           <a:lstStyle/>
           <a:p>
-            <a:pPr>
+            <a:pPr lvl="0" marL="457200" indent="-228600">
+              <a:buFont typeface="Calibri"/>
               <a:spcAft>
                 <a:spcPts val="1000"/>
               </a:spcAft>
+              <a:buSzPct val="100000"/>
               <a:buChar char="•"/>
               <a:lnSpc>
                 <a:spcPts val="2200"/>
@@ -4275,10 +4277,12 @@
             </a:r>
           </a:p>
           <a:p>
-            <a:pPr>
+            <a:pPr lvl="0" marL="457200" indent="-228600">
+              <a:buFont typeface="Calibri"/>
               <a:spcAft>
                 <a:spcPts val="1000"/>
               </a:spcAft>
+              <a:buSzPct val="100000"/>
               <a:buChar char="•"/>
               <a:lnSpc>
                 <a:spcPts val="2200"/>
@@ -4414,10 +4418,12 @@
           </a:bodyPr>
           <a:lstStyle/>
           <a:p>
-            <a:pPr>
+            <a:pPr lvl="0" marL="457200" indent="-228600">
+              <a:buFont typeface="Calibri"/>
               <a:spcAft>
                 <a:spcPts val="1000"/>
               </a:spcAft>
+              <a:buSzPct val="100000"/>
               <a:buChar char="•"/>
               <a:lnSpc>
                 <a:spcPts val="2200"/>
@@ -4434,10 +4440,12 @@
             </a:r>
           </a:p>
           <a:p>
-            <a:pPr>
+            <a:pPr lvl="0" marL="457200" indent="-228600">
+              <a:buFont typeface="Calibri"/>
               <a:spcAft>
                 <a:spcPts val="1000"/>
               </a:spcAft>
+              <a:buSzPct val="100000"/>
               <a:buChar char="•"/>
               <a:lnSpc>
                 <a:spcPts val="2200"/>
@@ -4454,10 +4462,12 @@
             </a:r>
           </a:p>
           <a:p>
-            <a:pPr>
+            <a:pPr lvl="0" marL="457200" indent="-228600">
+              <a:buFont typeface="Calibri"/>
               <a:spcAft>
                 <a:spcPts val="1000"/>
               </a:spcAft>
+              <a:buSzPct val="100000"/>
               <a:buChar char="•"/>
               <a:lnSpc>
                 <a:spcPts val="2200"/>
@@ -4593,10 +4603,12 @@
           </a:bodyPr>
           <a:lstStyle/>
           <a:p>
-            <a:pPr>
+            <a:pPr lvl="0" marL="457200" indent="-228600">
+              <a:buFont typeface="Calibri"/>
               <a:spcAft>
                 <a:spcPts val="1000"/>
               </a:spcAft>
+              <a:buSzPct val="100000"/>
               <a:buChar char="•"/>
               <a:lnSpc>
                 <a:spcPts val="2200"/>
@@ -4613,10 +4625,12 @@
             </a:r>
           </a:p>
           <a:p>
-            <a:pPr>
+            <a:pPr lvl="0" marL="457200" indent="-228600">
+              <a:buFont typeface="Calibri"/>
               <a:spcAft>
                 <a:spcPts val="1000"/>
               </a:spcAft>
+              <a:buSzPct val="100000"/>
               <a:buChar char="•"/>
               <a:lnSpc>
                 <a:spcPts val="2200"/>
@@ -4633,10 +4647,12 @@
             </a:r>
           </a:p>
           <a:p>
-            <a:pPr>
+            <a:pPr lvl="0" marL="457200" indent="-228600">
+              <a:buFont typeface="Calibri"/>
               <a:spcAft>
                 <a:spcPts val="1000"/>
               </a:spcAft>
+              <a:buSzPct val="100000"/>
               <a:buChar char="•"/>
               <a:lnSpc>
                 <a:spcPts val="2200"/>
@@ -4772,10 +4788,12 @@
           </a:bodyPr>
           <a:lstStyle/>
           <a:p>
-            <a:pPr>
+            <a:pPr lvl="0" marL="457200" indent="-228600">
+              <a:buFont typeface="Calibri"/>
               <a:spcAft>
                 <a:spcPts val="1000"/>
               </a:spcAft>
+              <a:buSzPct val="100000"/>
               <a:buChar char="•"/>
               <a:lnSpc>
                 <a:spcPts val="2200"/>
@@ -4792,10 +4810,12 @@
             </a:r>
           </a:p>
           <a:p>
-            <a:pPr>
+            <a:pPr lvl="0" marL="457200" indent="-228600">
+              <a:buFont typeface="Calibri"/>
               <a:spcAft>
                 <a:spcPts val="1000"/>
               </a:spcAft>
+              <a:buSzPct val="100000"/>
               <a:buChar char="•"/>
               <a:lnSpc>
                 <a:spcPts val="2200"/>
@@ -4812,10 +4832,12 @@
             </a:r>
           </a:p>
           <a:p>
-            <a:pPr>
+            <a:pPr lvl="0" marL="457200" indent="-228600">
+              <a:buFont typeface="Calibri"/>
               <a:spcAft>
                 <a:spcPts val="1000"/>
               </a:spcAft>
+              <a:buSzPct val="100000"/>
               <a:buChar char="•"/>
               <a:lnSpc>
                 <a:spcPts val="2200"/>
@@ -4832,10 +4854,12 @@
             </a:r>
           </a:p>
           <a:p>
-            <a:pPr>
+            <a:pPr lvl="0" marL="457200" indent="-228600">
+              <a:buFont typeface="Calibri"/>
               <a:spcAft>
                 <a:spcPts val="1000"/>
               </a:spcAft>
+              <a:buSzPct val="100000"/>
               <a:buChar char="•"/>
               <a:lnSpc>
                 <a:spcPts val="2200"/>
@@ -4971,10 +4995,12 @@
           </a:bodyPr>
           <a:lstStyle/>
           <a:p>
-            <a:pPr>
+            <a:pPr lvl="0" marL="457200" indent="-228600">
+              <a:buFont typeface="Calibri"/>
               <a:spcAft>
                 <a:spcPts val="1000"/>
               </a:spcAft>
+              <a:buSzPct val="100000"/>
               <a:buChar char="•"/>
               <a:lnSpc>
                 <a:spcPts val="2200"/>
@@ -4991,10 +5017,12 @@
             </a:r>
           </a:p>
           <a:p>
-            <a:pPr>
+            <a:pPr lvl="0" marL="457200" indent="-228600">
+              <a:buFont typeface="Calibri"/>
               <a:spcAft>
                 <a:spcPts val="1000"/>
               </a:spcAft>
+              <a:buSzPct val="100000"/>
               <a:buChar char="•"/>
               <a:lnSpc>
                 <a:spcPts val="2200"/>
@@ -5130,10 +5158,12 @@
           </a:bodyPr>
           <a:lstStyle/>
           <a:p>
-            <a:pPr>
+            <a:pPr lvl="0" marL="457200" indent="-228600">
+              <a:buFont typeface="Calibri"/>
               <a:spcAft>
                 <a:spcPts val="1000"/>
               </a:spcAft>
+              <a:buSzPct val="100000"/>
               <a:buChar char="•"/>
               <a:lnSpc>
                 <a:spcPts val="2200"/>
@@ -5150,10 +5180,12 @@
             </a:r>
           </a:p>
           <a:p>
-            <a:pPr>
+            <a:pPr lvl="0" marL="457200" indent="-228600">
+              <a:buFont typeface="Calibri"/>
               <a:spcAft>
                 <a:spcPts val="1000"/>
               </a:spcAft>
+              <a:buSzPct val="100000"/>
               <a:buChar char="•"/>
               <a:lnSpc>
                 <a:spcPts val="2200"/>
@@ -5289,10 +5321,12 @@
           </a:bodyPr>
           <a:lstStyle/>
           <a:p>
-            <a:pPr>
+            <a:pPr lvl="0" marL="457200" indent="-228600">
+              <a:buFont typeface="Calibri"/>
               <a:spcAft>
                 <a:spcPts val="1000"/>
               </a:spcAft>
+              <a:buSzPct val="100000"/>
               <a:buChar char="•"/>
               <a:lnSpc>
                 <a:spcPts val="2200"/>
@@ -5309,10 +5343,12 @@
             </a:r>
           </a:p>
           <a:p>
-            <a:pPr>
+            <a:pPr lvl="0" marL="457200" indent="-228600">
+              <a:buFont typeface="Calibri"/>
               <a:spcAft>
                 <a:spcPts val="1000"/>
               </a:spcAft>
+              <a:buSzPct val="100000"/>
               <a:buChar char="•"/>
               <a:lnSpc>
                 <a:spcPts val="2200"/>
@@ -5329,10 +5365,12 @@
             </a:r>
           </a:p>
           <a:p>
-            <a:pPr>
+            <a:pPr lvl="0" marL="457200" indent="-228600">
+              <a:buFont typeface="Calibri"/>
               <a:spcAft>
                 <a:spcPts val="1000"/>
               </a:spcAft>
+              <a:buSzPct val="100000"/>
               <a:buChar char="•"/>
               <a:lnSpc>
                 <a:spcPts val="2200"/>
@@ -5468,10 +5506,12 @@
           </a:bodyPr>
           <a:lstStyle/>
           <a:p>
-            <a:pPr>
+            <a:pPr lvl="0" marL="457200" indent="-228600">
+              <a:buFont typeface="Calibri"/>
               <a:spcAft>
                 <a:spcPts val="1000"/>
               </a:spcAft>
+              <a:buSzPct val="100000"/>
               <a:buChar char="•"/>
               <a:lnSpc>
                 <a:spcPts val="2200"/>
@@ -5488,10 +5528,12 @@
             </a:r>
           </a:p>
           <a:p>
-            <a:pPr>
+            <a:pPr lvl="0" marL="457200" indent="-228600">
+              <a:buFont typeface="Calibri"/>
               <a:spcAft>
                 <a:spcPts val="1000"/>
               </a:spcAft>
+              <a:buSzPct val="100000"/>
               <a:buChar char="•"/>
               <a:lnSpc>
                 <a:spcPts val="2200"/>
